--- a/docs/architecture.pptx
+++ b/docs/architecture.pptx
@@ -7282,7 +7282,7 @@
         </p:nvSpPr>
         <p:spPr>
           <a:xfrm>
-            <a:off x="2223247" y="1325487"/>
+            <a:off x="304995" y="440905"/>
             <a:ext cx="3630706" cy="2862322"/>
           </a:xfrm>
           <a:prstGeom prst="rect">
@@ -7350,7 +7350,7 @@
         </p:nvSpPr>
         <p:spPr>
           <a:xfrm>
-            <a:off x="2773943" y="1082078"/>
+            <a:off x="855691" y="187557"/>
             <a:ext cx="2339102" cy="252000"/>
           </a:xfrm>
           <a:prstGeom prst="rect">
@@ -7390,7 +7390,7 @@
         </p:nvSpPr>
         <p:spPr>
           <a:xfrm>
-            <a:off x="5113045" y="1082078"/>
+            <a:off x="3194793" y="187557"/>
             <a:ext cx="740908" cy="252000"/>
           </a:xfrm>
           <a:prstGeom prst="rect">
@@ -7435,7 +7435,7 @@
         </p:nvSpPr>
         <p:spPr>
           <a:xfrm>
-            <a:off x="6096000" y="3264479"/>
+            <a:off x="4177748" y="2379897"/>
             <a:ext cx="3630706" cy="923330"/>
           </a:xfrm>
           <a:prstGeom prst="rect">
@@ -7482,7 +7482,7 @@
         </p:nvSpPr>
         <p:spPr>
           <a:xfrm>
-            <a:off x="6096000" y="1072842"/>
+            <a:off x="4177748" y="188260"/>
             <a:ext cx="3630706" cy="2031325"/>
           </a:xfrm>
           <a:prstGeom prst="rect">

--- a/docs/architecture.pptx
+++ b/docs/architecture.pptx
@@ -269,7 +269,7 @@
           <a:p>
             <a:fld id="{1D539EC6-7AF1-418C-94A7-BD258F9FEED6}" type="datetimeFigureOut">
               <a:rPr kumimoji="1" lang="ja-JP" altLang="en-US" smtClean="0"/>
-              <a:t>2026/4/8</a:t>
+              <a:t>2026/4/19</a:t>
             </a:fld>
             <a:endParaRPr kumimoji="1" lang="ja-JP" altLang="en-US"/>
           </a:p>
@@ -499,7 +499,7 @@
           <a:p>
             <a:fld id="{1D539EC6-7AF1-418C-94A7-BD258F9FEED6}" type="datetimeFigureOut">
               <a:rPr kumimoji="1" lang="ja-JP" altLang="en-US" smtClean="0"/>
-              <a:t>2026/4/8</a:t>
+              <a:t>2026/4/19</a:t>
             </a:fld>
             <a:endParaRPr kumimoji="1" lang="ja-JP" altLang="en-US"/>
           </a:p>
@@ -739,7 +739,7 @@
           <a:p>
             <a:fld id="{1D539EC6-7AF1-418C-94A7-BD258F9FEED6}" type="datetimeFigureOut">
               <a:rPr kumimoji="1" lang="ja-JP" altLang="en-US" smtClean="0"/>
-              <a:t>2026/4/8</a:t>
+              <a:t>2026/4/19</a:t>
             </a:fld>
             <a:endParaRPr kumimoji="1" lang="ja-JP" altLang="en-US"/>
           </a:p>
@@ -3069,7 +3069,7 @@
           <a:p>
             <a:fld id="{1D539EC6-7AF1-418C-94A7-BD258F9FEED6}" type="datetimeFigureOut">
               <a:rPr kumimoji="1" lang="ja-JP" altLang="en-US" smtClean="0"/>
-              <a:t>2026/4/8</a:t>
+              <a:t>2026/4/19</a:t>
             </a:fld>
             <a:endParaRPr kumimoji="1" lang="ja-JP" altLang="en-US"/>
           </a:p>
@@ -4018,7 +4018,7 @@
           <a:p>
             <a:fld id="{1D539EC6-7AF1-418C-94A7-BD258F9FEED6}" type="datetimeFigureOut">
               <a:rPr kumimoji="1" lang="ja-JP" altLang="en-US" smtClean="0"/>
-              <a:t>2026/4/8</a:t>
+              <a:t>2026/4/19</a:t>
             </a:fld>
             <a:endParaRPr kumimoji="1" lang="ja-JP" altLang="en-US"/>
           </a:p>
@@ -4347,7 +4347,7 @@
           <a:p>
             <a:fld id="{1D539EC6-7AF1-418C-94A7-BD258F9FEED6}" type="datetimeFigureOut">
               <a:rPr kumimoji="1" lang="ja-JP" altLang="en-US" smtClean="0"/>
-              <a:t>2026/4/8</a:t>
+              <a:t>2026/4/19</a:t>
             </a:fld>
             <a:endParaRPr kumimoji="1" lang="ja-JP" altLang="en-US"/>
           </a:p>
@@ -4823,7 +4823,7 @@
           <a:p>
             <a:fld id="{1D539EC6-7AF1-418C-94A7-BD258F9FEED6}" type="datetimeFigureOut">
               <a:rPr kumimoji="1" lang="ja-JP" altLang="en-US" smtClean="0"/>
-              <a:t>2026/4/8</a:t>
+              <a:t>2026/4/19</a:t>
             </a:fld>
             <a:endParaRPr kumimoji="1" lang="ja-JP" altLang="en-US"/>
           </a:p>
@@ -4964,7 +4964,7 @@
           <a:p>
             <a:fld id="{1D539EC6-7AF1-418C-94A7-BD258F9FEED6}" type="datetimeFigureOut">
               <a:rPr kumimoji="1" lang="ja-JP" altLang="en-US" smtClean="0"/>
-              <a:t>2026/4/8</a:t>
+              <a:t>2026/4/19</a:t>
             </a:fld>
             <a:endParaRPr kumimoji="1" lang="ja-JP" altLang="en-US"/>
           </a:p>
@@ -5077,7 +5077,7 @@
           <a:p>
             <a:fld id="{1D539EC6-7AF1-418C-94A7-BD258F9FEED6}" type="datetimeFigureOut">
               <a:rPr kumimoji="1" lang="ja-JP" altLang="en-US" smtClean="0"/>
-              <a:t>2026/4/8</a:t>
+              <a:t>2026/4/19</a:t>
             </a:fld>
             <a:endParaRPr kumimoji="1" lang="ja-JP" altLang="en-US"/>
           </a:p>
@@ -5420,7 +5420,7 @@
           <a:p>
             <a:fld id="{1D539EC6-7AF1-418C-94A7-BD258F9FEED6}" type="datetimeFigureOut">
               <a:rPr kumimoji="1" lang="ja-JP" altLang="en-US" smtClean="0"/>
-              <a:t>2026/4/8</a:t>
+              <a:t>2026/4/19</a:t>
             </a:fld>
             <a:endParaRPr kumimoji="1" lang="ja-JP" altLang="en-US"/>
           </a:p>
@@ -5708,7 +5708,7 @@
           <a:p>
             <a:fld id="{1D539EC6-7AF1-418C-94A7-BD258F9FEED6}" type="datetimeFigureOut">
               <a:rPr kumimoji="1" lang="ja-JP" altLang="en-US" smtClean="0"/>
-              <a:t>2026/4/8</a:t>
+              <a:t>2026/4/19</a:t>
             </a:fld>
             <a:endParaRPr kumimoji="1" lang="ja-JP" altLang="en-US"/>
           </a:p>
@@ -5981,7 +5981,7 @@
           <a:p>
             <a:fld id="{1D539EC6-7AF1-418C-94A7-BD258F9FEED6}" type="datetimeFigureOut">
               <a:rPr kumimoji="1" lang="ja-JP" altLang="en-US" smtClean="0"/>
-              <a:t>2026/4/8</a:t>
+              <a:t>2026/4/19</a:t>
             </a:fld>
             <a:endParaRPr kumimoji="1" lang="ja-JP" altLang="en-US"/>
           </a:p>
@@ -7756,7 +7756,10 @@
           <a:lstStyle/>
           <a:p>
             <a:pPr algn="ctr"/>
-            <a:endParaRPr lang="ja-JP" altLang="en-US"/>
+            <a:endParaRPr lang="ja-JP" altLang="en-US">
+              <a:latin typeface="Meiryo UI" panose="020B0604030504040204" pitchFamily="50" charset="-128"/>
+              <a:ea typeface="Meiryo UI" panose="020B0604030504040204" pitchFamily="50" charset="-128"/>
+            </a:endParaRPr>
           </a:p>
         </p:txBody>
       </p:sp>
@@ -7781,7 +7784,9 @@
             <a:avLst/>
           </a:prstGeom>
           <a:solidFill>
-            <a:srgbClr val="FFC000"/>
+            <a:srgbClr val="FFC000">
+              <a:alpha val="50000"/>
+            </a:srgbClr>
           </a:solidFill>
         </p:spPr>
         <p:style>
@@ -7805,7 +7810,10 @@
           <a:lstStyle/>
           <a:p>
             <a:pPr algn="ctr"/>
-            <a:endParaRPr lang="ja-JP" altLang="en-US"/>
+            <a:endParaRPr lang="ja-JP" altLang="en-US">
+              <a:latin typeface="Meiryo UI" panose="020B0604030504040204" pitchFamily="50" charset="-128"/>
+              <a:ea typeface="Meiryo UI" panose="020B0604030504040204" pitchFamily="50" charset="-128"/>
+            </a:endParaRPr>
           </a:p>
         </p:txBody>
       </p:sp>
@@ -7854,7 +7862,10 @@
           <a:lstStyle/>
           <a:p>
             <a:pPr algn="ctr"/>
-            <a:endParaRPr lang="ja-JP" altLang="en-US"/>
+            <a:endParaRPr lang="ja-JP" altLang="en-US">
+              <a:latin typeface="Meiryo UI" panose="020B0604030504040204" pitchFamily="50" charset="-128"/>
+              <a:ea typeface="Meiryo UI" panose="020B0604030504040204" pitchFamily="50" charset="-128"/>
+            </a:endParaRPr>
           </a:p>
         </p:txBody>
       </p:sp>
@@ -7881,6 +7892,7 @@
             <a:avLst/>
           </a:prstGeom>
           <a:ln>
+            <a:prstDash val="dash"/>
             <a:tailEnd type="triangle"/>
           </a:ln>
         </p:spPr>
@@ -7922,6 +7934,10 @@
             <a:avLst/>
           </a:prstGeom>
           <a:ln>
+            <a:solidFill>
+              <a:srgbClr val="00B050"/>
+            </a:solidFill>
+            <a:prstDash val="dash"/>
             <a:tailEnd type="triangle"/>
           </a:ln>
         </p:spPr>
@@ -7955,7 +7971,7 @@
         <p:spPr>
           <a:xfrm>
             <a:off x="3377743" y="1393247"/>
-            <a:ext cx="1433406" cy="276999"/>
+            <a:ext cx="1537665" cy="276999"/>
           </a:xfrm>
           <a:prstGeom prst="rect">
             <a:avLst/>
@@ -7969,10 +7985,22 @@
           <a:lstStyle/>
           <a:p>
             <a:r>
-              <a:rPr lang="en-US" altLang="ja-JP" sz="1200"/>
+              <a:rPr lang="en-US" altLang="ja-JP" sz="1200">
+                <a:solidFill>
+                  <a:srgbClr val="00B050"/>
+                </a:solidFill>
+                <a:latin typeface="Meiryo UI" panose="020B0604030504040204" pitchFamily="50" charset="-128"/>
+                <a:ea typeface="Meiryo UI" panose="020B0604030504040204" pitchFamily="50" charset="-128"/>
+              </a:rPr>
               <a:t>e.getVelocity() * t</a:t>
             </a:r>
-            <a:endParaRPr lang="ja-JP" altLang="en-US" sz="1200"/>
+            <a:endParaRPr lang="ja-JP" altLang="en-US" sz="1200">
+              <a:solidFill>
+                <a:srgbClr val="00B050"/>
+              </a:solidFill>
+              <a:latin typeface="Meiryo UI" panose="020B0604030504040204" pitchFamily="50" charset="-128"/>
+              <a:ea typeface="Meiryo UI" panose="020B0604030504040204" pitchFamily="50" charset="-128"/>
+            </a:endParaRPr>
           </a:p>
         </p:txBody>
       </p:sp>
@@ -7991,7 +8019,7 @@
         <p:spPr>
           <a:xfrm>
             <a:off x="4042706" y="2769715"/>
-            <a:ext cx="556563" cy="276999"/>
+            <a:ext cx="595035" cy="276999"/>
           </a:xfrm>
           <a:prstGeom prst="rect">
             <a:avLst/>
@@ -8005,10 +8033,22 @@
           <a:lstStyle/>
           <a:p>
             <a:r>
-              <a:rPr lang="en-US" altLang="ja-JP" sz="1200"/>
+              <a:rPr lang="en-US" altLang="ja-JP" sz="1200">
+                <a:solidFill>
+                  <a:srgbClr val="FF0000"/>
+                </a:solidFill>
+                <a:latin typeface="Meiryo UI" panose="020B0604030504040204" pitchFamily="50" charset="-128"/>
+                <a:ea typeface="Meiryo UI" panose="020B0604030504040204" pitchFamily="50" charset="-128"/>
+              </a:rPr>
               <a:t>Vbt*t</a:t>
             </a:r>
-            <a:endParaRPr lang="ja-JP" altLang="en-US" sz="1200"/>
+            <a:endParaRPr lang="ja-JP" altLang="en-US" sz="1200">
+              <a:solidFill>
+                <a:srgbClr val="FF0000"/>
+              </a:solidFill>
+              <a:latin typeface="Meiryo UI" panose="020B0604030504040204" pitchFamily="50" charset="-128"/>
+              <a:ea typeface="Meiryo UI" panose="020B0604030504040204" pitchFamily="50" charset="-128"/>
+            </a:endParaRPr>
           </a:p>
         </p:txBody>
       </p:sp>
@@ -8035,6 +8075,10 @@
             <a:avLst/>
           </a:prstGeom>
           <a:ln>
+            <a:solidFill>
+              <a:srgbClr val="FF0000"/>
+            </a:solidFill>
+            <a:prstDash val="dash"/>
             <a:tailEnd type="triangle"/>
           </a:ln>
         </p:spPr>
@@ -8076,6 +8120,10 @@
             <a:avLst/>
           </a:prstGeom>
           <a:ln>
+            <a:solidFill>
+              <a:srgbClr val="FF0000"/>
+            </a:solidFill>
+            <a:prstDash val="dash"/>
             <a:tailEnd type="triangle"/>
           </a:ln>
         </p:spPr>
@@ -8117,6 +8165,10 @@
             <a:avLst/>
           </a:prstGeom>
           <a:ln>
+            <a:solidFill>
+              <a:srgbClr val="FF0000"/>
+            </a:solidFill>
+            <a:prstDash val="dash"/>
             <a:tailEnd type="triangle"/>
           </a:ln>
         </p:spPr>
@@ -8150,7 +8202,7 @@
         <p:spPr>
           <a:xfrm>
             <a:off x="5255748" y="2943410"/>
-            <a:ext cx="458780" cy="276999"/>
+            <a:ext cx="471604" cy="276999"/>
           </a:xfrm>
           <a:prstGeom prst="rect">
             <a:avLst/>
@@ -8164,10 +8216,22 @@
           <a:lstStyle/>
           <a:p>
             <a:r>
-              <a:rPr lang="en-US" altLang="ja-JP" sz="1200"/>
+              <a:rPr lang="en-US" altLang="ja-JP" sz="1200">
+                <a:solidFill>
+                  <a:srgbClr val="FF0000"/>
+                </a:solidFill>
+                <a:latin typeface="Meiryo UI" panose="020B0604030504040204" pitchFamily="50" charset="-128"/>
+                <a:ea typeface="Meiryo UI" panose="020B0604030504040204" pitchFamily="50" charset="-128"/>
+              </a:rPr>
               <a:t>dY1</a:t>
             </a:r>
-            <a:endParaRPr lang="ja-JP" altLang="en-US" sz="1200"/>
+            <a:endParaRPr lang="ja-JP" altLang="en-US" sz="1200">
+              <a:solidFill>
+                <a:srgbClr val="FF0000"/>
+              </a:solidFill>
+              <a:latin typeface="Meiryo UI" panose="020B0604030504040204" pitchFamily="50" charset="-128"/>
+              <a:ea typeface="Meiryo UI" panose="020B0604030504040204" pitchFamily="50" charset="-128"/>
+            </a:endParaRPr>
           </a:p>
         </p:txBody>
       </p:sp>
@@ -8186,7 +8250,7 @@
         <p:spPr>
           <a:xfrm>
             <a:off x="4378956" y="3633811"/>
-            <a:ext cx="458780" cy="276999"/>
+            <a:ext cx="476412" cy="276999"/>
           </a:xfrm>
           <a:prstGeom prst="rect">
             <a:avLst/>
@@ -8200,10 +8264,22 @@
           <a:lstStyle/>
           <a:p>
             <a:r>
-              <a:rPr lang="en-US" altLang="ja-JP" sz="1200"/>
+              <a:rPr lang="en-US" altLang="ja-JP" sz="1200">
+                <a:solidFill>
+                  <a:srgbClr val="FF0000"/>
+                </a:solidFill>
+                <a:latin typeface="Meiryo UI" panose="020B0604030504040204" pitchFamily="50" charset="-128"/>
+                <a:ea typeface="Meiryo UI" panose="020B0604030504040204" pitchFamily="50" charset="-128"/>
+              </a:rPr>
               <a:t>dX1</a:t>
             </a:r>
-            <a:endParaRPr lang="ja-JP" altLang="en-US" sz="1200"/>
+            <a:endParaRPr lang="ja-JP" altLang="en-US" sz="1200">
+              <a:solidFill>
+                <a:srgbClr val="FF0000"/>
+              </a:solidFill>
+              <a:latin typeface="Meiryo UI" panose="020B0604030504040204" pitchFamily="50" charset="-128"/>
+              <a:ea typeface="Meiryo UI" panose="020B0604030504040204" pitchFamily="50" charset="-128"/>
+            </a:endParaRPr>
           </a:p>
         </p:txBody>
       </p:sp>
@@ -8221,8 +8297,8 @@
         </p:nvSpPr>
         <p:spPr>
           <a:xfrm>
-            <a:off x="3403206" y="3449145"/>
-            <a:ext cx="423514" cy="276999"/>
+            <a:off x="2834936" y="3668139"/>
+            <a:ext cx="373820" cy="276999"/>
           </a:xfrm>
           <a:prstGeom prst="rect">
             <a:avLst/>
@@ -8236,10 +8312,22 @@
           <a:lstStyle/>
           <a:p>
             <a:r>
-              <a:rPr lang="en-US" altLang="ja-JP" sz="1200"/>
+              <a:rPr lang="en-US" altLang="ja-JP" sz="1200">
+                <a:solidFill>
+                  <a:srgbClr val="FF0000"/>
+                </a:solidFill>
+                <a:latin typeface="Meiryo UI" panose="020B0604030504040204" pitchFamily="50" charset="-128"/>
+                <a:ea typeface="Meiryo UI" panose="020B0604030504040204" pitchFamily="50" charset="-128"/>
+              </a:rPr>
               <a:t>θ1</a:t>
             </a:r>
-            <a:endParaRPr lang="ja-JP" altLang="en-US" sz="1200"/>
+            <a:endParaRPr lang="ja-JP" altLang="en-US" sz="1200">
+              <a:solidFill>
+                <a:srgbClr val="FF0000"/>
+              </a:solidFill>
+              <a:latin typeface="Meiryo UI" panose="020B0604030504040204" pitchFamily="50" charset="-128"/>
+              <a:ea typeface="Meiryo UI" panose="020B0604030504040204" pitchFamily="50" charset="-128"/>
+            </a:endParaRPr>
           </a:p>
         </p:txBody>
       </p:sp>
@@ -8257,8 +8345,8 @@
         </p:nvSpPr>
         <p:spPr>
           <a:xfrm>
-            <a:off x="1754614" y="4517932"/>
-            <a:ext cx="3217547" cy="1200329"/>
+            <a:off x="2082815" y="4639723"/>
+            <a:ext cx="3518912" cy="1754326"/>
           </a:xfrm>
           <a:prstGeom prst="rect">
             <a:avLst/>
@@ -8272,7 +8360,30 @@
           <a:lstStyle/>
           <a:p>
             <a:r>
-              <a:rPr lang="en-US" altLang="ja-JP" sz="1200"/>
+              <a:rPr lang="en-US" altLang="ja-JP" sz="1200">
+                <a:latin typeface="Meiryo UI" panose="020B0604030504040204" pitchFamily="50" charset="-128"/>
+                <a:ea typeface="Meiryo UI" panose="020B0604030504040204" pitchFamily="50" charset="-128"/>
+              </a:rPr>
+              <a:t>t</a:t>
+            </a:r>
+            <a:r>
+              <a:rPr lang="ja-JP" altLang="en-US" sz="1200">
+                <a:latin typeface="Meiryo UI" panose="020B0604030504040204" pitchFamily="50" charset="-128"/>
+                <a:ea typeface="Meiryo UI" panose="020B0604030504040204" pitchFamily="50" charset="-128"/>
+              </a:rPr>
+              <a:t>秒後の敵に対する赤い直角三角形のピタゴラスの定理</a:t>
+            </a:r>
+            <a:endParaRPr lang="en-US" altLang="ja-JP" sz="1200">
+              <a:latin typeface="Meiryo UI" panose="020B0604030504040204" pitchFamily="50" charset="-128"/>
+              <a:ea typeface="Meiryo UI" panose="020B0604030504040204" pitchFamily="50" charset="-128"/>
+            </a:endParaRPr>
+          </a:p>
+          <a:p>
+            <a:r>
+              <a:rPr lang="en-US" altLang="ja-JP" sz="1200">
+                <a:latin typeface="Meiryo UI" panose="020B0604030504040204" pitchFamily="50" charset="-128"/>
+                <a:ea typeface="Meiryo UI" panose="020B0604030504040204" pitchFamily="50" charset="-128"/>
+              </a:rPr>
               <a:t>(</a:t>
             </a:r>
             <a:r>
@@ -8280,29 +8391,76 @@
                 <a:solidFill>
                   <a:srgbClr val="0070C0"/>
                 </a:solidFill>
+                <a:latin typeface="Meiryo UI" panose="020B0604030504040204" pitchFamily="50" charset="-128"/>
+                <a:ea typeface="Meiryo UI" panose="020B0604030504040204" pitchFamily="50" charset="-128"/>
               </a:rPr>
               <a:t>Vbt</a:t>
             </a:r>
             <a:r>
-              <a:rPr lang="en-US" altLang="ja-JP" sz="1200"/>
+              <a:rPr lang="en-US" altLang="ja-JP" sz="1200">
+                <a:latin typeface="Meiryo UI" panose="020B0604030504040204" pitchFamily="50" charset="-128"/>
+                <a:ea typeface="Meiryo UI" panose="020B0604030504040204" pitchFamily="50" charset="-128"/>
+              </a:rPr>
               <a:t>*t)^2=dX1^2+dY1^2</a:t>
             </a:r>
           </a:p>
           <a:p>
             <a:r>
-              <a:rPr lang="en-US" altLang="ja-JP" sz="1200"/>
+              <a:rPr lang="ja-JP" altLang="en-US" sz="1200">
+                <a:latin typeface="Meiryo UI" panose="020B0604030504040204" pitchFamily="50" charset="-128"/>
+                <a:ea typeface="Meiryo UI" panose="020B0604030504040204" pitchFamily="50" charset="-128"/>
+              </a:rPr>
+              <a:t>この式を解き、最終的に弾を撃つ角度</a:t>
+            </a:r>
+            <a:r>
+              <a:rPr lang="en-US" altLang="ja-JP" sz="1200">
+                <a:latin typeface="Meiryo UI" panose="020B0604030504040204" pitchFamily="50" charset="-128"/>
+                <a:ea typeface="Meiryo UI" panose="020B0604030504040204" pitchFamily="50" charset="-128"/>
+              </a:rPr>
+              <a:t>(θ1)</a:t>
+            </a:r>
+            <a:r>
+              <a:rPr lang="ja-JP" altLang="en-US" sz="1200">
+                <a:latin typeface="Meiryo UI" panose="020B0604030504040204" pitchFamily="50" charset="-128"/>
+                <a:ea typeface="Meiryo UI" panose="020B0604030504040204" pitchFamily="50" charset="-128"/>
+              </a:rPr>
+              <a:t>を求める。</a:t>
+            </a:r>
+            <a:endParaRPr lang="en-US" altLang="ja-JP" sz="1200">
+              <a:latin typeface="Meiryo UI" panose="020B0604030504040204" pitchFamily="50" charset="-128"/>
+              <a:ea typeface="Meiryo UI" panose="020B0604030504040204" pitchFamily="50" charset="-128"/>
+            </a:endParaRPr>
+          </a:p>
+          <a:p>
+            <a:endParaRPr lang="en-US" altLang="ja-JP" sz="1200">
+              <a:latin typeface="Meiryo UI" panose="020B0604030504040204" pitchFamily="50" charset="-128"/>
+              <a:ea typeface="Meiryo UI" panose="020B0604030504040204" pitchFamily="50" charset="-128"/>
+            </a:endParaRPr>
+          </a:p>
+          <a:p>
+            <a:r>
+              <a:rPr lang="en-US" altLang="ja-JP" sz="1200">
+                <a:latin typeface="Meiryo UI" panose="020B0604030504040204" pitchFamily="50" charset="-128"/>
+                <a:ea typeface="Meiryo UI" panose="020B0604030504040204" pitchFamily="50" charset="-128"/>
+              </a:rPr>
               <a:t>dX1 = dX0+dXem</a:t>
             </a:r>
           </a:p>
           <a:p>
             <a:r>
-              <a:rPr lang="en-US" altLang="ja-JP" sz="1200"/>
+              <a:rPr lang="en-US" altLang="ja-JP" sz="1200">
+                <a:latin typeface="Meiryo UI" panose="020B0604030504040204" pitchFamily="50" charset="-128"/>
+                <a:ea typeface="Meiryo UI" panose="020B0604030504040204" pitchFamily="50" charset="-128"/>
+              </a:rPr>
               <a:t>dY1 = dY0+dYem</a:t>
             </a:r>
           </a:p>
           <a:p>
             <a:r>
-              <a:rPr lang="en-US" altLang="ja-JP" sz="1200"/>
+              <a:rPr lang="en-US" altLang="ja-JP" sz="1200">
+                <a:latin typeface="Meiryo UI" panose="020B0604030504040204" pitchFamily="50" charset="-128"/>
+                <a:ea typeface="Meiryo UI" panose="020B0604030504040204" pitchFamily="50" charset="-128"/>
+              </a:rPr>
               <a:t>dX0 = </a:t>
             </a:r>
             <a:r>
@@ -8310,11 +8468,16 @@
                 <a:solidFill>
                   <a:srgbClr val="0070C0"/>
                 </a:solidFill>
+                <a:latin typeface="Meiryo UI" panose="020B0604030504040204" pitchFamily="50" charset="-128"/>
+                <a:ea typeface="Meiryo UI" panose="020B0604030504040204" pitchFamily="50" charset="-128"/>
               </a:rPr>
               <a:t>e.getDistance()</a:t>
             </a:r>
             <a:r>
-              <a:rPr lang="en-US" altLang="ja-JP" sz="1200"/>
+              <a:rPr lang="en-US" altLang="ja-JP" sz="1200">
+                <a:latin typeface="Meiryo UI" panose="020B0604030504040204" pitchFamily="50" charset="-128"/>
+                <a:ea typeface="Meiryo UI" panose="020B0604030504040204" pitchFamily="50" charset="-128"/>
+              </a:rPr>
               <a:t>*</a:t>
             </a:r>
             <a:r>
@@ -8322,13 +8485,18 @@
                 <a:solidFill>
                   <a:srgbClr val="0070C0"/>
                 </a:solidFill>
+                <a:latin typeface="Meiryo UI" panose="020B0604030504040204" pitchFamily="50" charset="-128"/>
+                <a:ea typeface="Meiryo UI" panose="020B0604030504040204" pitchFamily="50" charset="-128"/>
               </a:rPr>
               <a:t>cos(e.getBearing())</a:t>
             </a:r>
           </a:p>
           <a:p>
             <a:r>
-              <a:rPr lang="en-US" altLang="ja-JP" sz="1200"/>
+              <a:rPr lang="en-US" altLang="ja-JP" sz="1200">
+                <a:latin typeface="Meiryo UI" panose="020B0604030504040204" pitchFamily="50" charset="-128"/>
+                <a:ea typeface="Meiryo UI" panose="020B0604030504040204" pitchFamily="50" charset="-128"/>
+              </a:rPr>
               <a:t>dY1 = </a:t>
             </a:r>
             <a:r>
@@ -8336,11 +8504,16 @@
                 <a:solidFill>
                   <a:srgbClr val="0070C0"/>
                 </a:solidFill>
+                <a:latin typeface="Meiryo UI" panose="020B0604030504040204" pitchFamily="50" charset="-128"/>
+                <a:ea typeface="Meiryo UI" panose="020B0604030504040204" pitchFamily="50" charset="-128"/>
               </a:rPr>
               <a:t>e.getDistance()</a:t>
             </a:r>
             <a:r>
-              <a:rPr lang="en-US" altLang="ja-JP" sz="1200"/>
+              <a:rPr lang="en-US" altLang="ja-JP" sz="1200">
+                <a:latin typeface="Meiryo UI" panose="020B0604030504040204" pitchFamily="50" charset="-128"/>
+                <a:ea typeface="Meiryo UI" panose="020B0604030504040204" pitchFamily="50" charset="-128"/>
+              </a:rPr>
               <a:t>*</a:t>
             </a:r>
             <a:r>
@@ -8348,13 +8521,18 @@
                 <a:solidFill>
                   <a:srgbClr val="0070C0"/>
                 </a:solidFill>
+                <a:latin typeface="Meiryo UI" panose="020B0604030504040204" pitchFamily="50" charset="-128"/>
+                <a:ea typeface="Meiryo UI" panose="020B0604030504040204" pitchFamily="50" charset="-128"/>
               </a:rPr>
               <a:t>sin(e.getBearing())</a:t>
             </a:r>
           </a:p>
           <a:p>
             <a:r>
-              <a:rPr lang="en-US" altLang="ja-JP" sz="1200"/>
+              <a:rPr lang="en-US" altLang="ja-JP" sz="1200">
+                <a:latin typeface="Meiryo UI" panose="020B0604030504040204" pitchFamily="50" charset="-128"/>
+                <a:ea typeface="Meiryo UI" panose="020B0604030504040204" pitchFamily="50" charset="-128"/>
+              </a:rPr>
               <a:t>[dXem,dYem] = </a:t>
             </a:r>
             <a:r>
@@ -8362,11 +8540,16 @@
                 <a:solidFill>
                   <a:srgbClr val="0070C0"/>
                 </a:solidFill>
+                <a:latin typeface="Meiryo UI" panose="020B0604030504040204" pitchFamily="50" charset="-128"/>
+                <a:ea typeface="Meiryo UI" panose="020B0604030504040204" pitchFamily="50" charset="-128"/>
               </a:rPr>
               <a:t>e.getVelocity()</a:t>
             </a:r>
             <a:r>
-              <a:rPr lang="en-US" altLang="ja-JP" sz="1200"/>
+              <a:rPr lang="en-US" altLang="ja-JP" sz="1200">
+                <a:latin typeface="Meiryo UI" panose="020B0604030504040204" pitchFamily="50" charset="-128"/>
+                <a:ea typeface="Meiryo UI" panose="020B0604030504040204" pitchFamily="50" charset="-128"/>
+              </a:rPr>
               <a:t>*t</a:t>
             </a:r>
           </a:p>
@@ -8395,6 +8578,7 @@
             <a:avLst/>
           </a:prstGeom>
           <a:ln>
+            <a:prstDash val="dash"/>
             <a:tailEnd type="triangle"/>
           </a:ln>
         </p:spPr>
@@ -8436,6 +8620,7 @@
             <a:avLst/>
           </a:prstGeom>
           <a:ln>
+            <a:prstDash val="dash"/>
             <a:tailEnd type="triangle"/>
           </a:ln>
         </p:spPr>
@@ -8468,8 +8653,8 @@
         </p:nvSpPr>
         <p:spPr>
           <a:xfrm>
-            <a:off x="2650664" y="4057370"/>
-            <a:ext cx="458780" cy="276999"/>
+            <a:off x="2688582" y="3989936"/>
+            <a:ext cx="476412" cy="276999"/>
           </a:xfrm>
           <a:prstGeom prst="rect">
             <a:avLst/>
@@ -8483,10 +8668,22 @@
           <a:lstStyle/>
           <a:p>
             <a:r>
-              <a:rPr lang="en-US" altLang="ja-JP" sz="1200"/>
+              <a:rPr lang="en-US" altLang="ja-JP" sz="1200">
+                <a:solidFill>
+                  <a:srgbClr val="0070C0"/>
+                </a:solidFill>
+                <a:latin typeface="Meiryo UI" panose="020B0604030504040204" pitchFamily="50" charset="-128"/>
+                <a:ea typeface="Meiryo UI" panose="020B0604030504040204" pitchFamily="50" charset="-128"/>
+              </a:rPr>
               <a:t>dX0</a:t>
             </a:r>
-            <a:endParaRPr lang="ja-JP" altLang="en-US" sz="1200"/>
+            <a:endParaRPr lang="ja-JP" altLang="en-US" sz="1200">
+              <a:solidFill>
+                <a:srgbClr val="0070C0"/>
+              </a:solidFill>
+              <a:latin typeface="Meiryo UI" panose="020B0604030504040204" pitchFamily="50" charset="-128"/>
+              <a:ea typeface="Meiryo UI" panose="020B0604030504040204" pitchFamily="50" charset="-128"/>
+            </a:endParaRPr>
           </a:p>
         </p:txBody>
       </p:sp>
@@ -8519,10 +8716,22 @@
           <a:lstStyle/>
           <a:p>
             <a:r>
-              <a:rPr lang="en-US" altLang="ja-JP" sz="1200"/>
+              <a:rPr lang="en-US" altLang="ja-JP" sz="1200">
+                <a:solidFill>
+                  <a:srgbClr val="0070C0"/>
+                </a:solidFill>
+                <a:latin typeface="Meiryo UI" panose="020B0604030504040204" pitchFamily="50" charset="-128"/>
+                <a:ea typeface="Meiryo UI" panose="020B0604030504040204" pitchFamily="50" charset="-128"/>
+              </a:rPr>
               <a:t>dY0</a:t>
             </a:r>
-            <a:endParaRPr lang="ja-JP" altLang="en-US" sz="1200"/>
+            <a:endParaRPr lang="ja-JP" altLang="en-US" sz="1200">
+              <a:solidFill>
+                <a:srgbClr val="0070C0"/>
+              </a:solidFill>
+              <a:latin typeface="Meiryo UI" panose="020B0604030504040204" pitchFamily="50" charset="-128"/>
+              <a:ea typeface="Meiryo UI" panose="020B0604030504040204" pitchFamily="50" charset="-128"/>
+            </a:endParaRPr>
           </a:p>
         </p:txBody>
       </p:sp>
@@ -8549,6 +8758,10 @@
             <a:avLst/>
           </a:prstGeom>
           <a:ln>
+            <a:solidFill>
+              <a:srgbClr val="00B050"/>
+            </a:solidFill>
+            <a:prstDash val="dash"/>
             <a:tailEnd type="triangle"/>
           </a:ln>
         </p:spPr>
@@ -8590,6 +8803,10 @@
             <a:avLst/>
           </a:prstGeom>
           <a:ln>
+            <a:solidFill>
+              <a:srgbClr val="00B050"/>
+            </a:solidFill>
+            <a:prstDash val="dash"/>
             <a:tailEnd type="triangle"/>
           </a:ln>
         </p:spPr>
@@ -8623,7 +8840,7 @@
         <p:spPr>
           <a:xfrm>
             <a:off x="4001334" y="613631"/>
-            <a:ext cx="593432" cy="276999"/>
+            <a:ext cx="610616" cy="276999"/>
           </a:xfrm>
           <a:prstGeom prst="rect">
             <a:avLst/>
@@ -8637,10 +8854,22 @@
           <a:lstStyle/>
           <a:p>
             <a:r>
-              <a:rPr lang="en-US" altLang="ja-JP" sz="1200"/>
+              <a:rPr lang="en-US" altLang="ja-JP" sz="1200">
+                <a:solidFill>
+                  <a:srgbClr val="00B050"/>
+                </a:solidFill>
+                <a:latin typeface="Meiryo UI" panose="020B0604030504040204" pitchFamily="50" charset="-128"/>
+                <a:ea typeface="Meiryo UI" panose="020B0604030504040204" pitchFamily="50" charset="-128"/>
+              </a:rPr>
               <a:t>dXem</a:t>
             </a:r>
-            <a:endParaRPr lang="ja-JP" altLang="en-US" sz="1200"/>
+            <a:endParaRPr lang="ja-JP" altLang="en-US" sz="1200">
+              <a:solidFill>
+                <a:srgbClr val="00B050"/>
+              </a:solidFill>
+              <a:latin typeface="Meiryo UI" panose="020B0604030504040204" pitchFamily="50" charset="-128"/>
+              <a:ea typeface="Meiryo UI" panose="020B0604030504040204" pitchFamily="50" charset="-128"/>
+            </a:endParaRPr>
           </a:p>
         </p:txBody>
       </p:sp>
@@ -8659,7 +8888,7 @@
         <p:spPr>
           <a:xfrm>
             <a:off x="5255747" y="1215994"/>
-            <a:ext cx="593432" cy="276999"/>
+            <a:ext cx="601383" cy="276999"/>
           </a:xfrm>
           <a:prstGeom prst="rect">
             <a:avLst/>
@@ -8673,10 +8902,22 @@
           <a:lstStyle/>
           <a:p>
             <a:r>
-              <a:rPr lang="en-US" altLang="ja-JP" sz="1200"/>
+              <a:rPr lang="en-US" altLang="ja-JP" sz="1200">
+                <a:solidFill>
+                  <a:srgbClr val="00B050"/>
+                </a:solidFill>
+                <a:latin typeface="Meiryo UI" panose="020B0604030504040204" pitchFamily="50" charset="-128"/>
+                <a:ea typeface="Meiryo UI" panose="020B0604030504040204" pitchFamily="50" charset="-128"/>
+              </a:rPr>
               <a:t>dYem</a:t>
             </a:r>
-            <a:endParaRPr lang="ja-JP" altLang="en-US" sz="1200"/>
+            <a:endParaRPr lang="ja-JP" altLang="en-US" sz="1200">
+              <a:solidFill>
+                <a:srgbClr val="00B050"/>
+              </a:solidFill>
+              <a:latin typeface="Meiryo UI" panose="020B0604030504040204" pitchFamily="50" charset="-128"/>
+              <a:ea typeface="Meiryo UI" panose="020B0604030504040204" pitchFamily="50" charset="-128"/>
+            </a:endParaRPr>
           </a:p>
         </p:txBody>
       </p:sp>
@@ -8694,7 +8935,7 @@
         </p:nvSpPr>
         <p:spPr>
           <a:xfrm>
-            <a:off x="5877830" y="1189001"/>
+            <a:off x="6404909" y="889006"/>
             <a:ext cx="4729180" cy="5280420"/>
           </a:xfrm>
           <a:prstGeom prst="rect">
@@ -12258,6 +12499,131 @@
                 <a:latin typeface="Consolas" panose="020B0609020204030204" pitchFamily="49" charset="0"/>
               </a:rPr>
               <a:t>}</a:t>
+            </a:r>
+          </a:p>
+        </p:txBody>
+      </p:sp>
+      <p:sp>
+        <p:nvSpPr>
+          <p:cNvPr id="2" name="テキスト ボックス 1">
+            <a:extLst>
+              <a:ext uri="{FF2B5EF4-FFF2-40B4-BE49-F238E27FC236}">
+                <a16:creationId xmlns:a16="http://schemas.microsoft.com/office/drawing/2014/main" id="{4BE5AB67-EE8F-AC66-9C8D-A80BF7FB8275}"/>
+              </a:ext>
+            </a:extLst>
+          </p:cNvPr>
+          <p:cNvSpPr txBox="1"/>
+          <p:nvPr/>
+        </p:nvSpPr>
+        <p:spPr>
+          <a:xfrm>
+            <a:off x="2126467" y="4195869"/>
+            <a:ext cx="604653" cy="261610"/>
+          </a:xfrm>
+          <a:prstGeom prst="rect">
+            <a:avLst/>
+          </a:prstGeom>
+          <a:noFill/>
+        </p:spPr>
+        <p:txBody>
+          <a:bodyPr wrap="none" rtlCol="0">
+            <a:spAutoFit/>
+          </a:bodyPr>
+          <a:lstStyle/>
+          <a:p>
+            <a:r>
+              <a:rPr kumimoji="1" lang="en-US" altLang="ja-JP" sz="1050">
+                <a:latin typeface="Meiryo UI" panose="020B0604030504040204" pitchFamily="50" charset="-128"/>
+                <a:ea typeface="Meiryo UI" panose="020B0604030504040204" pitchFamily="50" charset="-128"/>
+              </a:rPr>
+              <a:t>Player</a:t>
+            </a:r>
+            <a:endParaRPr kumimoji="1" lang="ja-JP" altLang="en-US" sz="1050">
+              <a:latin typeface="Meiryo UI" panose="020B0604030504040204" pitchFamily="50" charset="-128"/>
+              <a:ea typeface="Meiryo UI" panose="020B0604030504040204" pitchFamily="50" charset="-128"/>
+            </a:endParaRPr>
+          </a:p>
+        </p:txBody>
+      </p:sp>
+      <p:sp>
+        <p:nvSpPr>
+          <p:cNvPr id="8" name="テキスト ボックス 7">
+            <a:extLst>
+              <a:ext uri="{FF2B5EF4-FFF2-40B4-BE49-F238E27FC236}">
+                <a16:creationId xmlns:a16="http://schemas.microsoft.com/office/drawing/2014/main" id="{C8A9F45B-C62A-A2DC-9D19-F8C4576BE943}"/>
+              </a:ext>
+            </a:extLst>
+          </p:cNvPr>
+          <p:cNvSpPr txBox="1"/>
+          <p:nvPr/>
+        </p:nvSpPr>
+        <p:spPr>
+          <a:xfrm>
+            <a:off x="5296855" y="2187009"/>
+            <a:ext cx="750526" cy="253916"/>
+          </a:xfrm>
+          <a:prstGeom prst="rect">
+            <a:avLst/>
+          </a:prstGeom>
+          <a:noFill/>
+        </p:spPr>
+        <p:txBody>
+          <a:bodyPr wrap="none" rtlCol="0">
+            <a:spAutoFit/>
+          </a:bodyPr>
+          <a:lstStyle/>
+          <a:p>
+            <a:r>
+              <a:rPr kumimoji="1" lang="en-US" altLang="ja-JP" sz="1050">
+                <a:latin typeface="Meiryo UI" panose="020B0604030504040204" pitchFamily="50" charset="-128"/>
+                <a:ea typeface="Meiryo UI" panose="020B0604030504040204" pitchFamily="50" charset="-128"/>
+              </a:rPr>
+              <a:t>t</a:t>
+            </a:r>
+            <a:r>
+              <a:rPr kumimoji="1" lang="ja-JP" altLang="en-US" sz="1050">
+                <a:latin typeface="Meiryo UI" panose="020B0604030504040204" pitchFamily="50" charset="-128"/>
+                <a:ea typeface="Meiryo UI" panose="020B0604030504040204" pitchFamily="50" charset="-128"/>
+              </a:rPr>
+              <a:t>秒後の敵</a:t>
+            </a:r>
+          </a:p>
+        </p:txBody>
+      </p:sp>
+      <p:sp>
+        <p:nvSpPr>
+          <p:cNvPr id="10" name="テキスト ボックス 9">
+            <a:extLst>
+              <a:ext uri="{FF2B5EF4-FFF2-40B4-BE49-F238E27FC236}">
+                <a16:creationId xmlns:a16="http://schemas.microsoft.com/office/drawing/2014/main" id="{BE12489B-2E58-D95B-1B1B-2C0E7EEDC0B6}"/>
+              </a:ext>
+            </a:extLst>
+          </p:cNvPr>
+          <p:cNvSpPr txBox="1"/>
+          <p:nvPr/>
+        </p:nvSpPr>
+        <p:spPr>
+          <a:xfrm>
+            <a:off x="2228294" y="1086372"/>
+            <a:ext cx="833883" cy="253916"/>
+          </a:xfrm>
+          <a:prstGeom prst="rect">
+            <a:avLst/>
+          </a:prstGeom>
+          <a:noFill/>
+        </p:spPr>
+        <p:txBody>
+          <a:bodyPr wrap="none" rtlCol="0">
+            <a:spAutoFit/>
+          </a:bodyPr>
+          <a:lstStyle/>
+          <a:p>
+            <a:r>
+              <a:rPr kumimoji="1" lang="ja-JP" altLang="en-US" sz="1050">
+                <a:latin typeface="Meiryo UI" panose="020B0604030504040204" pitchFamily="50" charset="-128"/>
+                <a:ea typeface="Meiryo UI" panose="020B0604030504040204" pitchFamily="50" charset="-128"/>
+              </a:rPr>
+              <a:t>敵の現在地</a:t>
             </a:r>
           </a:p>
         </p:txBody>
